--- a/diplom/contest/SafeAgriRoute_конкурс_презентация_заполненная.pptx
+++ b/diplom/contest/SafeAgriRoute_конкурс_презентация_заполненная.pptx
@@ -285,7 +285,7 @@
       </p15:sldGuideLst>
     </p:ext>
     <p:ext uri="GoogleSlidesCustomDataVersion2">
-      <go:slidesCustomData xmlns:go="http://customooxmlschemas.google.com/" xmlns:ahyp="http://schemas.microsoft.com/office/drawing/2018/hyperlinkcolor" xmlns:p15="http://schemas.microsoft.com/office/powerpoint/2012/main" xmlns:p14="http://schemas.microsoft.com/office/powerpoint/2010/main" xmlns:com="http://schemas.openxmlformats.org/drawingml/2006/compatibility" xmlns:pvml="urn:schemas-microsoft-com:office:powerpoint" xmlns:v="urn:schemas-microsoft-com:vml" xmlns:o="urn:schemas-microsoft-com:office:office" xmlns:dgm="http://schemas.openxmlformats.org/drawingml/2006/diagram" xmlns:c="http://schemas.openxmlformats.org/drawingml/2006/chart" xmlns:mv="urn:schemas-microsoft-com:mac:vml" xmlns:mc="http://schemas.openxmlformats.org/markup-compatibility/2006" xmlns="" r:id="rId24" roundtripDataSignature="AMtx7mhCa5ZYw6VaQt2xxky0d4Uuf1cRew=="/>
+      <go:slidesCustomData xmlns="" xmlns:mc="http://schemas.openxmlformats.org/markup-compatibility/2006" xmlns:mv="urn:schemas-microsoft-com:mac:vml" xmlns:c="http://schemas.openxmlformats.org/drawingml/2006/chart" xmlns:dgm="http://schemas.openxmlformats.org/drawingml/2006/diagram" xmlns:o="urn:schemas-microsoft-com:office:office" xmlns:v="urn:schemas-microsoft-com:vml" xmlns:pvml="urn:schemas-microsoft-com:office:powerpoint" xmlns:com="http://schemas.openxmlformats.org/drawingml/2006/compatibility" xmlns:p14="http://schemas.microsoft.com/office/powerpoint/2010/main" xmlns:p15="http://schemas.microsoft.com/office/powerpoint/2012/main" xmlns:ahyp="http://schemas.microsoft.com/office/drawing/2018/hyperlinkcolor" xmlns:go="http://customooxmlschemas.google.com/" r:id="rId24" roundtripDataSignature="AMtx7mhCa5ZYw6VaQt2xxky0d4Uuf1cRew=="/>
     </p:ext>
   </p:extLst>
 </p:presentation>
@@ -17238,9 +17238,58 @@
               <a:buNone/>
             </a:pPr>
             <a:r>
-              <a:t>0-6 мес.: завершение MVP hardening, расширение пилотных интеграций, стабилизация KPI.</a:t>
-            </a:r>
-            <a:endParaRPr sz="2000" b="0" i="0" u="none" strike="noStrike" cap="none">
+              <a:rPr dirty="0"/>
+              <a:t>0-6 </a:t>
+            </a:r>
+            <a:r>
+              <a:rPr dirty="0" err="1"/>
+              <a:t>мес</a:t>
+            </a:r>
+            <a:r>
+              <a:rPr dirty="0"/>
+              <a:t>.: </a:t>
+            </a:r>
+            <a:r>
+              <a:rPr dirty="0" err="1"/>
+              <a:t>завершение</a:t>
+            </a:r>
+            <a:r>
+              <a:rPr dirty="0"/>
+              <a:t> MVP hardening, </a:t>
+            </a:r>
+            <a:r>
+              <a:rPr dirty="0" err="1"/>
+              <a:t>расширение</a:t>
+            </a:r>
+            <a:r>
+              <a:rPr dirty="0"/>
+              <a:t> </a:t>
+            </a:r>
+            <a:r>
+              <a:rPr dirty="0" err="1"/>
+              <a:t>пилотных</a:t>
+            </a:r>
+            <a:r>
+              <a:rPr dirty="0"/>
+              <a:t> </a:t>
+            </a:r>
+            <a:r>
+              <a:rPr dirty="0" err="1"/>
+              <a:t>интеграций</a:t>
+            </a:r>
+            <a:r>
+              <a:rPr dirty="0"/>
+              <a:t>, </a:t>
+            </a:r>
+            <a:r>
+              <a:rPr dirty="0" err="1"/>
+              <a:t>стабилизация</a:t>
+            </a:r>
+            <a:r>
+              <a:rPr dirty="0"/>
+              <a:t> KPI.</a:t>
+            </a:r>
+            <a:endParaRPr sz="2000" b="0" i="0" u="none" strike="noStrike" cap="none" dirty="0">
               <a:solidFill>
                 <a:schemeClr val="dk1"/>
               </a:solidFill>
@@ -17252,22 +17301,232 @@
           </a:p>
           <a:p>
             <a:r>
-              <a:t>6-12 мес.: коммерческие пилоты в регионах, стандартизация внедрения и обучения операторов.</a:t>
+              <a:rPr dirty="0"/>
+              <a:t>6-12 </a:t>
+            </a:r>
+            <a:r>
+              <a:rPr dirty="0" err="1"/>
+              <a:t>мес</a:t>
+            </a:r>
+            <a:r>
+              <a:rPr dirty="0"/>
+              <a:t>.: </a:t>
+            </a:r>
+            <a:r>
+              <a:rPr dirty="0" err="1"/>
+              <a:t>коммерческие</a:t>
+            </a:r>
+            <a:r>
+              <a:rPr dirty="0"/>
+              <a:t> </a:t>
+            </a:r>
+            <a:r>
+              <a:rPr dirty="0" err="1"/>
+              <a:t>пилоты</a:t>
+            </a:r>
+            <a:r>
+              <a:rPr dirty="0"/>
+              <a:t> в </a:t>
+            </a:r>
+            <a:r>
+              <a:rPr dirty="0" err="1"/>
+              <a:t>регионах</a:t>
+            </a:r>
+            <a:r>
+              <a:rPr dirty="0"/>
+              <a:t>, </a:t>
+            </a:r>
+            <a:r>
+              <a:rPr dirty="0" err="1"/>
+              <a:t>стандартизация</a:t>
+            </a:r>
+            <a:r>
+              <a:rPr dirty="0"/>
+              <a:t> </a:t>
+            </a:r>
+            <a:r>
+              <a:rPr dirty="0" err="1"/>
+              <a:t>внедрения</a:t>
+            </a:r>
+            <a:r>
+              <a:rPr dirty="0"/>
+              <a:t> и </a:t>
+            </a:r>
+            <a:r>
+              <a:rPr dirty="0" err="1"/>
+              <a:t>обучения</a:t>
+            </a:r>
+            <a:r>
+              <a:rPr dirty="0"/>
+              <a:t> </a:t>
+            </a:r>
+            <a:r>
+              <a:rPr dirty="0" err="1"/>
+              <a:t>операторов</a:t>
+            </a:r>
+            <a:r>
+              <a:rPr dirty="0"/>
+              <a:t>.</a:t>
             </a:r>
           </a:p>
           <a:p>
             <a:r>
-              <a:t>12-18 мес.: масштабирование, партнерская сеть, доработка enterprise-функций.</a:t>
+              <a:rPr dirty="0"/>
+              <a:t>12-18 </a:t>
+            </a:r>
+            <a:r>
+              <a:rPr dirty="0" err="1"/>
+              <a:t>мес</a:t>
+            </a:r>
+            <a:r>
+              <a:rPr dirty="0"/>
+              <a:t>.: </a:t>
+            </a:r>
+            <a:r>
+              <a:rPr dirty="0" err="1"/>
+              <a:t>масштабирование</a:t>
+            </a:r>
+            <a:r>
+              <a:rPr dirty="0"/>
+              <a:t>, </a:t>
+            </a:r>
+            <a:r>
+              <a:rPr dirty="0" err="1"/>
+              <a:t>партнерская</a:t>
+            </a:r>
+            <a:r>
+              <a:rPr dirty="0"/>
+              <a:t> </a:t>
+            </a:r>
+            <a:r>
+              <a:rPr dirty="0" err="1"/>
+              <a:t>сеть</a:t>
+            </a:r>
+            <a:r>
+              <a:rPr dirty="0"/>
+              <a:t>, </a:t>
+            </a:r>
+            <a:r>
+              <a:rPr dirty="0" err="1"/>
+              <a:t>доработка</a:t>
+            </a:r>
+            <a:r>
+              <a:rPr dirty="0"/>
+              <a:t> enterprise-</a:t>
+            </a:r>
+            <a:r>
+              <a:rPr dirty="0" err="1"/>
+              <a:t>функций</a:t>
+            </a:r>
+            <a:r>
+              <a:rPr dirty="0"/>
+              <a:t>.</a:t>
             </a:r>
           </a:p>
           <a:p>
             <a:r>
-              <a:t>Ключевые метрики роста: число хозяйств, площадь под управлением, доля миссий без ручного вмешательства.</a:t>
-            </a:r>
-          </a:p>
-          <a:p>
-            <a:r>
-              <a:t>Источник: roadmap проекта SafeAgriRoute (внутренний план).</a:t>
+              <a:rPr dirty="0" err="1"/>
+              <a:t>Ключевые</a:t>
+            </a:r>
+            <a:r>
+              <a:rPr dirty="0"/>
+              <a:t> </a:t>
+            </a:r>
+            <a:r>
+              <a:rPr dirty="0" err="1"/>
+              <a:t>метрики</a:t>
+            </a:r>
+            <a:r>
+              <a:rPr dirty="0"/>
+              <a:t> </a:t>
+            </a:r>
+            <a:r>
+              <a:rPr dirty="0" err="1"/>
+              <a:t>роста</a:t>
+            </a:r>
+            <a:r>
+              <a:rPr dirty="0"/>
+              <a:t>: </a:t>
+            </a:r>
+            <a:r>
+              <a:rPr dirty="0" err="1"/>
+              <a:t>число</a:t>
+            </a:r>
+            <a:r>
+              <a:rPr dirty="0"/>
+              <a:t> </a:t>
+            </a:r>
+            <a:r>
+              <a:rPr dirty="0" err="1"/>
+              <a:t>хозяйств</a:t>
+            </a:r>
+            <a:r>
+              <a:rPr dirty="0"/>
+              <a:t>, </a:t>
+            </a:r>
+            <a:r>
+              <a:rPr dirty="0" err="1"/>
+              <a:t>площадь</a:t>
+            </a:r>
+            <a:r>
+              <a:rPr dirty="0"/>
+              <a:t> </a:t>
+            </a:r>
+            <a:r>
+              <a:rPr dirty="0" err="1"/>
+              <a:t>под</a:t>
+            </a:r>
+            <a:r>
+              <a:rPr dirty="0"/>
+              <a:t> </a:t>
+            </a:r>
+            <a:r>
+              <a:rPr dirty="0" err="1"/>
+              <a:t>управлением</a:t>
+            </a:r>
+            <a:r>
+              <a:rPr dirty="0"/>
+              <a:t>, </a:t>
+            </a:r>
+            <a:r>
+              <a:rPr dirty="0" err="1"/>
+              <a:t>доля</a:t>
+            </a:r>
+            <a:r>
+              <a:rPr dirty="0"/>
+              <a:t> </a:t>
+            </a:r>
+            <a:r>
+              <a:rPr dirty="0" err="1"/>
+              <a:t>миссий</a:t>
+            </a:r>
+            <a:r>
+              <a:rPr dirty="0"/>
+              <a:t> </a:t>
+            </a:r>
+            <a:r>
+              <a:rPr dirty="0" err="1"/>
+              <a:t>без</a:t>
+            </a:r>
+            <a:r>
+              <a:rPr dirty="0"/>
+              <a:t> </a:t>
+            </a:r>
+            <a:r>
+              <a:rPr dirty="0" err="1"/>
+              <a:t>ручного</a:t>
+            </a:r>
+            <a:r>
+              <a:rPr dirty="0"/>
+              <a:t> </a:t>
+            </a:r>
+            <a:r>
+              <a:rPr dirty="0" err="1"/>
+              <a:t>вмешательства</a:t>
+            </a:r>
+            <a:r>
+              <a:rPr dirty="0"/>
+              <a:t>.</a:t>
             </a:r>
           </a:p>
         </p:txBody>
@@ -19319,9 +19578,78 @@
               <a:buNone/>
             </a:pPr>
             <a:r>
-              <a:t>Мы проверили решение в трех сценариях: штатный, помехи, динамическая обстановка.</a:t>
-            </a:r>
-            <a:endParaRPr sz="2000" b="0" i="0" u="none" strike="noStrike" cap="none">
+              <a:rPr dirty="0" err="1"/>
+              <a:t>Мы</a:t>
+            </a:r>
+            <a:r>
+              <a:rPr dirty="0"/>
+              <a:t> </a:t>
+            </a:r>
+            <a:r>
+              <a:rPr dirty="0" err="1"/>
+              <a:t>проверили</a:t>
+            </a:r>
+            <a:r>
+              <a:rPr dirty="0"/>
+              <a:t> </a:t>
+            </a:r>
+            <a:r>
+              <a:rPr dirty="0" err="1"/>
+              <a:t>решение</a:t>
+            </a:r>
+            <a:r>
+              <a:rPr dirty="0"/>
+              <a:t> в </a:t>
+            </a:r>
+            <a:r>
+              <a:rPr dirty="0" err="1"/>
+              <a:t>трех</a:t>
+            </a:r>
+            <a:r>
+              <a:rPr dirty="0"/>
+              <a:t> </a:t>
+            </a:r>
+            <a:r>
+              <a:rPr dirty="0" err="1"/>
+              <a:t>сценариях</a:t>
+            </a:r>
+            <a:r>
+              <a:rPr dirty="0"/>
+              <a:t>: </a:t>
+            </a:r>
+            <a:r>
+              <a:rPr dirty="0" err="1"/>
+              <a:t>штатный</a:t>
+            </a:r>
+            <a:r>
+              <a:rPr dirty="0"/>
+              <a:t>, </a:t>
+            </a:r>
+            <a:r>
+              <a:rPr dirty="0" err="1"/>
+              <a:t>помехи</a:t>
+            </a:r>
+            <a:r>
+              <a:rPr dirty="0"/>
+              <a:t>, </a:t>
+            </a:r>
+            <a:r>
+              <a:rPr dirty="0" err="1"/>
+              <a:t>динамическая</a:t>
+            </a:r>
+            <a:r>
+              <a:rPr dirty="0"/>
+              <a:t> </a:t>
+            </a:r>
+            <a:r>
+              <a:rPr dirty="0" err="1"/>
+              <a:t>обстановка</a:t>
+            </a:r>
+            <a:r>
+              <a:rPr dirty="0"/>
+              <a:t>.</a:t>
+            </a:r>
+            <a:endParaRPr sz="2000" b="0" i="0" u="none" strike="noStrike" cap="none" dirty="0">
               <a:solidFill>
                 <a:schemeClr val="dk1"/>
               </a:solidFill>
@@ -19333,22 +19661,206 @@
           </a:p>
           <a:p>
             <a:r>
-              <a:t>При помехах: покрытие выросло с 21,87% до 91,82%, опасные пересечения снижены с 2 до 0.</a:t>
+              <a:rPr dirty="0" err="1"/>
+              <a:t>При</a:t>
+            </a:r>
+            <a:r>
+              <a:rPr dirty="0"/>
+              <a:t> </a:t>
+            </a:r>
+            <a:r>
+              <a:rPr dirty="0" err="1"/>
+              <a:t>помехах</a:t>
+            </a:r>
+            <a:r>
+              <a:rPr dirty="0"/>
+              <a:t>: </a:t>
+            </a:r>
+            <a:r>
+              <a:rPr dirty="0" err="1"/>
+              <a:t>покрытие</a:t>
+            </a:r>
+            <a:r>
+              <a:rPr dirty="0"/>
+              <a:t> </a:t>
+            </a:r>
+            <a:r>
+              <a:rPr dirty="0" err="1"/>
+              <a:t>выросло</a:t>
+            </a:r>
+            <a:r>
+              <a:rPr dirty="0"/>
+              <a:t> с 21,87% </a:t>
+            </a:r>
+            <a:r>
+              <a:rPr dirty="0" err="1"/>
+              <a:t>до</a:t>
+            </a:r>
+            <a:r>
+              <a:rPr dirty="0"/>
+              <a:t> 91,82%, </a:t>
+            </a:r>
+            <a:r>
+              <a:rPr dirty="0" err="1"/>
+              <a:t>опасные</a:t>
+            </a:r>
+            <a:r>
+              <a:rPr dirty="0"/>
+              <a:t> </a:t>
+            </a:r>
+            <a:r>
+              <a:rPr dirty="0" err="1"/>
+              <a:t>пересечения</a:t>
+            </a:r>
+            <a:r>
+              <a:rPr dirty="0"/>
+              <a:t> </a:t>
+            </a:r>
+            <a:r>
+              <a:rPr dirty="0" err="1"/>
+              <a:t>снижены</a:t>
+            </a:r>
+            <a:r>
+              <a:rPr dirty="0"/>
+              <a:t> с 2 </a:t>
+            </a:r>
+            <a:r>
+              <a:rPr dirty="0" err="1"/>
+              <a:t>до</a:t>
+            </a:r>
+            <a:r>
+              <a:rPr dirty="0"/>
+              <a:t> 0.</a:t>
             </a:r>
           </a:p>
           <a:p>
             <a:r>
-              <a:t>В динамическом сценарии миссия достигла 100% покрытия к финалу.</a:t>
+              <a:rPr dirty="0"/>
+              <a:t>В </a:t>
+            </a:r>
+            <a:r>
+              <a:rPr dirty="0" err="1"/>
+              <a:t>динамическом</a:t>
+            </a:r>
+            <a:r>
+              <a:rPr dirty="0"/>
+              <a:t> </a:t>
+            </a:r>
+            <a:r>
+              <a:rPr dirty="0" err="1"/>
+              <a:t>сценарии</a:t>
+            </a:r>
+            <a:r>
+              <a:rPr dirty="0"/>
+              <a:t> </a:t>
+            </a:r>
+            <a:r>
+              <a:rPr dirty="0" err="1"/>
+              <a:t>миссия</a:t>
+            </a:r>
+            <a:r>
+              <a:rPr dirty="0"/>
+              <a:t> </a:t>
+            </a:r>
+            <a:r>
+              <a:rPr dirty="0" err="1"/>
+              <a:t>достигла</a:t>
+            </a:r>
+            <a:r>
+              <a:rPr dirty="0"/>
+              <a:t> 100% </a:t>
+            </a:r>
+            <a:r>
+              <a:rPr dirty="0" err="1"/>
+              <a:t>покрытия</a:t>
+            </a:r>
+            <a:r>
+              <a:rPr dirty="0"/>
+              <a:t> к </a:t>
+            </a:r>
+            <a:r>
+              <a:rPr dirty="0" err="1"/>
+              <a:t>финалу</a:t>
+            </a:r>
+            <a:r>
+              <a:rPr dirty="0"/>
+              <a:t>.</a:t>
             </a:r>
           </a:p>
           <a:p>
             <a:r>
-              <a:t>Это означает более предсказуемое выполнение работ и меньше переделок.</a:t>
+              <a:rPr dirty="0" err="1"/>
+              <a:t>Это</a:t>
+            </a:r>
+            <a:r>
+              <a:rPr dirty="0"/>
+              <a:t> </a:t>
+            </a:r>
+            <a:r>
+              <a:rPr dirty="0" err="1"/>
+              <a:t>означает</a:t>
+            </a:r>
+            <a:r>
+              <a:rPr dirty="0"/>
+              <a:t> </a:t>
+            </a:r>
+            <a:r>
+              <a:rPr dirty="0" err="1"/>
+              <a:t>более</a:t>
+            </a:r>
+            <a:r>
+              <a:rPr dirty="0"/>
+              <a:t> </a:t>
+            </a:r>
+            <a:r>
+              <a:rPr dirty="0" err="1"/>
+              <a:t>предсказуемое</a:t>
+            </a:r>
+            <a:r>
+              <a:rPr dirty="0"/>
+              <a:t> </a:t>
+            </a:r>
+            <a:r>
+              <a:rPr dirty="0" err="1"/>
+              <a:t>выполнение</a:t>
+            </a:r>
+            <a:r>
+              <a:rPr dirty="0"/>
+              <a:t> </a:t>
+            </a:r>
+            <a:r>
+              <a:rPr dirty="0" err="1"/>
+              <a:t>работ</a:t>
+            </a:r>
+            <a:r>
+              <a:rPr dirty="0"/>
+              <a:t> и </a:t>
+            </a:r>
+            <a:r>
+              <a:rPr dirty="0" err="1"/>
+              <a:t>меньше</a:t>
+            </a:r>
+            <a:r>
+              <a:rPr dirty="0"/>
+              <a:t> </a:t>
+            </a:r>
+            <a:r>
+              <a:rPr dirty="0" err="1"/>
+              <a:t>переделок</a:t>
+            </a:r>
+            <a:r>
+              <a:rPr dirty="0"/>
+              <a:t>.</a:t>
             </a:r>
           </a:p>
           <a:p>
             <a:r>
-              <a:t>Источник: backend/simulation + diplom/reports/validation_prompt20_report.md.</a:t>
+              <a:rPr dirty="0" err="1"/>
+              <a:t>Источник</a:t>
+            </a:r>
+            <a:r>
+              <a:rPr dirty="0"/>
+              <a:t>: backend/simulation</a:t>
             </a:r>
           </a:p>
         </p:txBody>
